--- a/education/vibe-coding-training/01_개념_서사.pptx
+++ b/education/vibe-coding-training/01_개념_서사.pptx
@@ -5,20 +5,20 @@
     <p:sldMasterId id="2147483648" r:id="rId1"/>
   </p:sldMasterIdLst>
   <p:notesMasterIdLst>
-    <p:notesMasterId r:id="rId16"/>
+    <p:notesMasterId r:id="rId13"/>
   </p:notesMasterIdLst>
   <p:sldIdLst>
     <p:sldId id="256" r:id="rId2"/>
-    <p:sldId id="273" r:id="rId24"/>
-    <p:sldId id="272" r:id="rId23"/>
-    <p:sldId id="275" r:id="rId25"/>
-    <p:sldId id="276" r:id="rId26"/>
-    <p:sldId id="277" r:id="rId27"/>
-    <p:sldId id="278" r:id="rId28"/>
-    <p:sldId id="279" r:id="rId29"/>
-    <p:sldId id="280" r:id="rId30"/>
-    <p:sldId id="271" r:id="rId22"/>
-    <p:sldId id="281" r:id="rId31"/>
+    <p:sldId id="273" r:id="rId3"/>
+    <p:sldId id="272" r:id="rId4"/>
+    <p:sldId id="275" r:id="rId5"/>
+    <p:sldId id="276" r:id="rId6"/>
+    <p:sldId id="277" r:id="rId7"/>
+    <p:sldId id="278" r:id="rId8"/>
+    <p:sldId id="279" r:id="rId9"/>
+    <p:sldId id="280" r:id="rId10"/>
+    <p:sldId id="271" r:id="rId11"/>
+    <p:sldId id="281" r:id="rId12"/>
   </p:sldIdLst>
   <p:sldSz cx="9144000" cy="5143500" type="screen16x9"/>
   <p:notesSz cx="5143500" cy="9144000"/>
@@ -912,7 +912,7 @@
                   <a:srgbClr val="8899BB"/>
                 </a:solidFill>
               </a:rPr>
-              <a:t xml:space="preserve">| </a:t>
+              <a:t>| </a:t>
             </a:r>
             <a:r>
               <a:rPr lang="en-US" sz="1050" b="1" dirty="0" err="1">
@@ -928,7 +928,7 @@
                   <a:srgbClr val="8899BB"/>
                 </a:solidFill>
               </a:rPr>
-              <a:t xml:space="preserve"> 업데이트</a:t>
+              <a:t> 업데이트</a:t>
             </a:r>
             <a:r>
               <a:rPr lang="en-US" sz="1050" dirty="0">
@@ -936,7 +936,7 @@
                   <a:srgbClr val="8899BB"/>
                 </a:solidFill>
               </a:rPr>
-              <a:t xml:space="preserve">: 2026-06-28  </a:t>
+              <a:t>: 2026-06-28  </a:t>
             </a:r>
             <a:r>
               <a:rPr lang="en-US" sz="1050" b="1" dirty="0">
@@ -952,7 +952,7 @@
                   <a:srgbClr val="8899BB"/>
                 </a:solidFill>
               </a:rPr>
-              <a:t xml:space="preserve">  </a:t>
+              <a:t>  </a:t>
             </a:r>
             <a:r>
               <a:rPr lang="en-US" sz="1050" b="1" dirty="0">
@@ -968,7 +968,7 @@
                   <a:srgbClr val="8899BB"/>
                 </a:solidFill>
               </a:rPr>
-              <a:t xml:space="preserve">: AI 시대 개발의 3단 발전과 그 끝에 남는 것 · </a:t>
+              <a:t>: AI 시대 개발의 3단 발전과 그 끝에 남는 것 · </a:t>
             </a:r>
             <a:r>
               <a:rPr lang="en-US" sz="1050" dirty="0" err="1">
@@ -984,7 +984,7 @@
                   <a:srgbClr val="8899BB"/>
                 </a:solidFill>
               </a:rPr>
-              <a:t xml:space="preserve"> </a:t>
+              <a:t> </a:t>
             </a:r>
             <a:r>
               <a:rPr lang="en-US" sz="1050" b="1" dirty="0">
@@ -1000,7 +1000,7 @@
                   <a:srgbClr val="8899BB"/>
                 </a:solidFill>
               </a:rPr>
-              <a:t xml:space="preserve"> </a:t>
+              <a:t> </a:t>
             </a:r>
             <a:r>
               <a:rPr lang="ko-KR" altLang="en-US" sz="1050" b="1" dirty="0">
@@ -1016,7 +1016,7 @@
                   <a:srgbClr val="8899BB"/>
                 </a:solidFill>
               </a:rPr>
-              <a:t xml:space="preserve"> </a:t>
+              <a:t> </a:t>
             </a:r>
             <a:r>
               <a:rPr lang="en-US" altLang="ko-KR" sz="1050" dirty="0">
@@ -1024,7 +1024,7 @@
                   <a:srgbClr val="8899BB"/>
                 </a:solidFill>
               </a:rPr>
-              <a:t xml:space="preserve">: </a:t>
+              <a:t>: </a:t>
             </a:r>
             <a:r>
               <a:rPr lang="en-US" altLang="ko-KR" sz="1050" dirty="0">
@@ -1033,7 +1033,7 @@
                 </a:solidFill>
                 <a:hlinkClick r:id="rId3"/>
               </a:rPr>
-              <a:t xml:space="preserve">AI </a:t>
+              <a:t>AI </a:t>
             </a:r>
             <a:r>
               <a:rPr lang="ko-KR" altLang="en-US" sz="1050" dirty="0">
@@ -1095,7 +1095,7 @@
 </p:sld>
 </file>
 
-<file path=ppt/slides/slide16.xml><?xml version="1.0" encoding="utf-8"?>
+<file path=ppt/slides/slide10.xml><?xml version="1.0" encoding="utf-8"?>
 <p:sld xmlns:a="http://schemas.openxmlformats.org/drawingml/2006/main" xmlns:r="http://schemas.openxmlformats.org/officeDocument/2006/relationships" xmlns:p="http://schemas.openxmlformats.org/presentationml/2006/main">
   <p:cSld name="Slide 16">
     <p:bg>
@@ -1531,7 +1531,7 @@
                   <a:srgbClr val="8899BB"/>
                 </a:solidFill>
               </a:rPr>
-              <a:t xml:space="preserve">다음 파트에서 </a:t>
+              <a:t>다음 파트에서 </a:t>
             </a:r>
             <a:r>
               <a:rPr lang="en-US" sz="1400" b="1" i="1" dirty="0">
@@ -1561,7 +1561,856 @@
 </p:sld>
 </file>
 
-<file path=ppt/slides/slide17.xml><?xml version="1.0" encoding="utf-8"?>
+<file path=ppt/slides/slide11.xml><?xml version="1.0" encoding="utf-8"?>
+<p:sld xmlns:a="http://schemas.openxmlformats.org/drawingml/2006/main" xmlns:r="http://schemas.openxmlformats.org/officeDocument/2006/relationships" xmlns:p="http://schemas.openxmlformats.org/presentationml/2006/main">
+  <p:cSld name="Slide 25">
+    <p:bg>
+      <p:bgPr>
+        <a:solidFill>
+          <a:srgbClr val="F4F7FE"/>
+        </a:solidFill>
+        <a:effectLst/>
+      </p:bgPr>
+    </p:bg>
+    <p:spTree>
+      <p:nvGrpSpPr>
+        <p:cNvPr id="1" name=""/>
+        <p:cNvGrpSpPr/>
+        <p:nvPr/>
+      </p:nvGrpSpPr>
+      <p:grpSpPr>
+        <a:xfrm>
+          <a:off x="0" y="0"/>
+          <a:ext cx="0" cy="0"/>
+          <a:chOff x="0" y="0"/>
+          <a:chExt cx="0" cy="0"/>
+        </a:xfrm>
+      </p:grpSpPr>
+      <p:sp>
+        <p:nvSpPr>
+          <p:cNvPr id="2" name="LeftBar"/>
+          <p:cNvSpPr/>
+          <p:nvPr/>
+        </p:nvSpPr>
+        <p:spPr>
+          <a:xfrm>
+            <a:off x="0" y="0"/>
+            <a:ext cx="73152" cy="5143500"/>
+          </a:xfrm>
+          <a:prstGeom prst="rect">
+            <a:avLst/>
+          </a:prstGeom>
+          <a:solidFill>
+            <a:srgbClr val="A78BFA"/>
+          </a:solidFill>
+          <a:ln w="12700">
+            <a:solidFill>
+              <a:srgbClr val="A78BFA"/>
+            </a:solidFill>
+          </a:ln>
+        </p:spPr>
+      </p:sp>
+      <p:sp>
+        <p:nvSpPr>
+          <p:cNvPr id="3" name="Kicker"/>
+          <p:cNvSpPr/>
+          <p:nvPr/>
+        </p:nvSpPr>
+        <p:spPr>
+          <a:xfrm>
+            <a:off x="500000" y="330000"/>
+            <a:ext cx="5000000" cy="300000"/>
+          </a:xfrm>
+          <a:prstGeom prst="rect">
+            <a:avLst/>
+          </a:prstGeom>
+          <a:noFill/>
+          <a:ln/>
+        </p:spPr>
+        <p:txBody>
+          <a:bodyPr wrap="square" lIns="0" tIns="0" rIns="0" bIns="0" rtlCol="0" anchor="ctr"/>
+          <a:lstStyle/>
+          <a:p>
+            <a:pPr marL="0" indent="0">
+              <a:buNone/>
+            </a:pPr>
+            <a:r>
+              <a:rPr lang="en-US" sz="1400" b="1" dirty="0">
+                <a:solidFill>
+                  <a:srgbClr val="A78BFA"/>
+                </a:solidFill>
+              </a:rPr>
+              <a:t>NEXT  ·  다음 파트 예고</a:t>
+            </a:r>
+            <a:endParaRPr lang="en-US" sz="1400" dirty="0"/>
+          </a:p>
+        </p:txBody>
+      </p:sp>
+      <p:sp>
+        <p:nvSpPr>
+          <p:cNvPr id="4" name="Title"/>
+          <p:cNvSpPr/>
+          <p:nvPr/>
+        </p:nvSpPr>
+        <p:spPr>
+          <a:xfrm>
+            <a:off x="500000" y="750000"/>
+            <a:ext cx="8144000" cy="700000"/>
+          </a:xfrm>
+          <a:prstGeom prst="rect">
+            <a:avLst/>
+          </a:prstGeom>
+          <a:noFill/>
+          <a:ln/>
+        </p:spPr>
+        <p:txBody>
+          <a:bodyPr wrap="square" lIns="0" tIns="0" rIns="0" bIns="0" rtlCol="0" anchor="ctr"/>
+          <a:lstStyle/>
+          <a:p>
+            <a:pPr marL="0" indent="0">
+              <a:buNone/>
+            </a:pPr>
+            <a:r>
+              <a:rPr lang="ko-KR" altLang="en-US" sz="3600" b="1" dirty="0">
+                <a:solidFill>
+                  <a:srgbClr val="1E2761"/>
+                </a:solidFill>
+                <a:latin typeface="Arial Black" pitchFamily="34" charset="0"/>
+                <a:ea typeface="Arial Black" pitchFamily="34" charset="-122"/>
+                <a:cs typeface="Arial Black" pitchFamily="34" charset="-120"/>
+              </a:rPr>
+              <a:t>그 문서, 실제로 어떻게 생겼나?</a:t>
+            </a:r>
+            <a:endParaRPr lang="en-US" sz="3600" dirty="0"/>
+          </a:p>
+        </p:txBody>
+      </p:sp>
+      <p:sp>
+        <p:nvSpPr>
+          <p:cNvPr id="10" name="Card1"/>
+          <p:cNvSpPr/>
+          <p:nvPr/>
+        </p:nvSpPr>
+        <p:spPr>
+          <a:xfrm>
+            <a:off x="500000" y="1750000"/>
+            <a:ext cx="2680000" cy="2100000"/>
+          </a:xfrm>
+          <a:prstGeom prst="roundRect">
+            <a:avLst>
+              <a:gd name="adj" fmla="val 8000"/>
+            </a:avLst>
+          </a:prstGeom>
+          <a:solidFill>
+            <a:srgbClr val="FFFFFF"/>
+          </a:solidFill>
+          <a:ln w="19050">
+            <a:solidFill>
+              <a:srgbClr val="4FC3F7"/>
+            </a:solidFill>
+          </a:ln>
+          <a:effectLst>
+            <a:outerShdw blurRad="76200" dist="12700" dir="8100000" algn="bl" rotWithShape="0">
+              <a:srgbClr val="000000">
+                <a:alpha val="12000"/>
+              </a:srgbClr>
+            </a:outerShdw>
+          </a:effectLst>
+        </p:spPr>
+      </p:sp>
+      <p:sp>
+        <p:nvSpPr>
+          <p:cNvPr id="11" name="Card1T"/>
+          <p:cNvSpPr/>
+          <p:nvPr/>
+        </p:nvSpPr>
+        <p:spPr>
+          <a:xfrm>
+            <a:off x="620000" y="1850000"/>
+            <a:ext cx="2440000" cy="1900000"/>
+          </a:xfrm>
+          <a:prstGeom prst="rect">
+            <a:avLst/>
+          </a:prstGeom>
+          <a:noFill/>
+          <a:ln/>
+        </p:spPr>
+        <p:txBody>
+          <a:bodyPr wrap="square" rtlCol="0" anchor="ctr"/>
+          <a:lstStyle/>
+          <a:p>
+            <a:pPr marL="0" indent="0" algn="ctr">
+              <a:buNone/>
+            </a:pPr>
+            <a:r>
+              <a:rPr lang="en-US" sz="3000" dirty="0">
+                <a:solidFill>
+                  <a:srgbClr val="4FC3F7"/>
+                </a:solidFill>
+              </a:rPr>
+              <a:t>📦</a:t>
+            </a:r>
+          </a:p>
+          <a:p>
+            <a:pPr marL="0" indent="0" algn="ctr">
+              <a:buNone/>
+            </a:pPr>
+            <a:r>
+              <a:rPr lang="ko-KR" altLang="en-US" sz="1300" b="1">
+                <a:solidFill>
+                  <a:srgbClr val="1E2761"/>
+                </a:solidFill>
+              </a:rPr>
+              <a:t>하네스 엔지니어링 구성</a:t>
+            </a:r>
+            <a:endParaRPr lang="ko-KR" altLang="en-US" sz="1300" b="1" dirty="0">
+              <a:solidFill>
+                <a:srgbClr val="1E2761"/>
+              </a:solidFill>
+            </a:endParaRPr>
+          </a:p>
+          <a:p>
+            <a:pPr marL="0" indent="0" algn="ctr">
+              <a:buNone/>
+            </a:pPr>
+            <a:r>
+              <a:rPr lang="ko-KR" altLang="en-US" sz="1000" dirty="0">
+                <a:solidFill>
+                  <a:srgbClr val="6B7280"/>
+                </a:solidFill>
+              </a:rPr>
+              <a:t>SKILL.md · CLAUDE.md</a:t>
+            </a:r>
+          </a:p>
+          <a:p>
+            <a:pPr marL="0" indent="0" algn="ctr">
+              <a:buNone/>
+            </a:pPr>
+            <a:r>
+              <a:rPr lang="ko-KR" altLang="en-US" sz="1000" dirty="0">
+                <a:solidFill>
+                  <a:srgbClr val="6B7280"/>
+                </a:solidFill>
+              </a:rPr>
+              <a:t>AGENTS.md · MEMORY.md</a:t>
+            </a:r>
+          </a:p>
+        </p:txBody>
+      </p:sp>
+      <p:sp>
+        <p:nvSpPr>
+          <p:cNvPr id="20" name="Card2"/>
+          <p:cNvSpPr/>
+          <p:nvPr/>
+        </p:nvSpPr>
+        <p:spPr>
+          <a:xfrm>
+            <a:off x="3232000" y="1750000"/>
+            <a:ext cx="2680000" cy="2100000"/>
+          </a:xfrm>
+          <a:prstGeom prst="roundRect">
+            <a:avLst>
+              <a:gd name="adj" fmla="val 8000"/>
+            </a:avLst>
+          </a:prstGeom>
+          <a:solidFill>
+            <a:srgbClr val="FFFFFF"/>
+          </a:solidFill>
+          <a:ln w="19050">
+            <a:solidFill>
+              <a:srgbClr val="34D399"/>
+            </a:solidFill>
+          </a:ln>
+          <a:effectLst>
+            <a:outerShdw blurRad="76200" dist="12700" dir="8100000" algn="bl" rotWithShape="0">
+              <a:srgbClr val="000000">
+                <a:alpha val="12000"/>
+              </a:srgbClr>
+            </a:outerShdw>
+          </a:effectLst>
+        </p:spPr>
+      </p:sp>
+      <p:sp>
+        <p:nvSpPr>
+          <p:cNvPr id="21" name="Card2T"/>
+          <p:cNvSpPr/>
+          <p:nvPr/>
+        </p:nvSpPr>
+        <p:spPr>
+          <a:xfrm>
+            <a:off x="3352000" y="1850000"/>
+            <a:ext cx="2440000" cy="1900000"/>
+          </a:xfrm>
+          <a:prstGeom prst="rect">
+            <a:avLst/>
+          </a:prstGeom>
+          <a:noFill/>
+          <a:ln/>
+        </p:spPr>
+        <p:txBody>
+          <a:bodyPr wrap="square" rtlCol="0" anchor="ctr"/>
+          <a:lstStyle/>
+          <a:p>
+            <a:pPr marL="0" indent="0" algn="ctr">
+              <a:buNone/>
+            </a:pPr>
+            <a:r>
+              <a:rPr lang="en-US" sz="3000" dirty="0">
+                <a:solidFill>
+                  <a:srgbClr val="34D399"/>
+                </a:solidFill>
+              </a:rPr>
+              <a:t>🎯</a:t>
+            </a:r>
+          </a:p>
+          <a:p>
+            <a:pPr marL="0" indent="0" algn="ctr">
+              <a:buNone/>
+            </a:pPr>
+            <a:r>
+              <a:rPr lang="ko-KR" altLang="en-US" sz="1300" b="1">
+                <a:solidFill>
+                  <a:srgbClr val="1E2761"/>
+                </a:solidFill>
+              </a:rPr>
+              <a:t>표준으로 </a:t>
+            </a:r>
+            <a:r>
+              <a:rPr lang="ko-KR" altLang="en-US" sz="1300" b="1" dirty="0">
+                <a:solidFill>
+                  <a:srgbClr val="1E2761"/>
+                </a:solidFill>
+              </a:rPr>
+              <a:t>수렴</a:t>
+            </a:r>
+          </a:p>
+          <a:p>
+            <a:pPr marL="0" indent="0" algn="ctr">
+              <a:buNone/>
+            </a:pPr>
+            <a:r>
+              <a:rPr lang="ko-KR" altLang="en-US" sz="1000" dirty="0">
+                <a:solidFill>
+                  <a:srgbClr val="6B7280"/>
+                </a:solidFill>
+              </a:rPr>
+              <a:t>3사가 같은 규격으로</a:t>
+            </a:r>
+          </a:p>
+          <a:p>
+            <a:pPr marL="0" indent="0" algn="ctr">
+              <a:buNone/>
+            </a:pPr>
+            <a:r>
+              <a:rPr lang="ko-KR" altLang="en-US" sz="1000" dirty="0">
+                <a:solidFill>
+                  <a:srgbClr val="6B7280"/>
+                </a:solidFill>
+              </a:rPr>
+              <a:t>수렴하는 흐름</a:t>
+            </a:r>
+          </a:p>
+        </p:txBody>
+      </p:sp>
+      <p:sp>
+        <p:nvSpPr>
+          <p:cNvPr id="30" name="Card3"/>
+          <p:cNvSpPr/>
+          <p:nvPr/>
+        </p:nvSpPr>
+        <p:spPr>
+          <a:xfrm>
+            <a:off x="5964000" y="1750000"/>
+            <a:ext cx="2680000" cy="2100000"/>
+          </a:xfrm>
+          <a:prstGeom prst="roundRect">
+            <a:avLst>
+              <a:gd name="adj" fmla="val 8000"/>
+            </a:avLst>
+          </a:prstGeom>
+          <a:solidFill>
+            <a:srgbClr val="FFFFFF"/>
+          </a:solidFill>
+          <a:ln w="19050">
+            <a:solidFill>
+              <a:srgbClr val="A78BFA"/>
+            </a:solidFill>
+          </a:ln>
+          <a:effectLst>
+            <a:outerShdw blurRad="76200" dist="12700" dir="8100000" algn="bl" rotWithShape="0">
+              <a:srgbClr val="000000">
+                <a:alpha val="12000"/>
+              </a:srgbClr>
+            </a:outerShdw>
+          </a:effectLst>
+        </p:spPr>
+      </p:sp>
+      <p:sp>
+        <p:nvSpPr>
+          <p:cNvPr id="31" name="Card3T"/>
+          <p:cNvSpPr/>
+          <p:nvPr/>
+        </p:nvSpPr>
+        <p:spPr>
+          <a:xfrm>
+            <a:off x="6084000" y="1850000"/>
+            <a:ext cx="2440000" cy="1900000"/>
+          </a:xfrm>
+          <a:prstGeom prst="rect">
+            <a:avLst/>
+          </a:prstGeom>
+          <a:noFill/>
+          <a:ln/>
+        </p:spPr>
+        <p:txBody>
+          <a:bodyPr wrap="square" rtlCol="0" anchor="ctr"/>
+          <a:lstStyle/>
+          <a:p>
+            <a:pPr marL="0" indent="0" algn="ctr">
+              <a:buNone/>
+            </a:pPr>
+            <a:r>
+              <a:rPr lang="en-US" sz="3000">
+                <a:solidFill>
+                  <a:srgbClr val="A78BFA"/>
+                </a:solidFill>
+              </a:rPr>
+              <a:t>🚀</a:t>
+            </a:r>
+            <a:endParaRPr lang="ko-KR" altLang="en-US" sz="1500" b="1" dirty="0">
+              <a:solidFill>
+                <a:srgbClr val="A78BFA"/>
+              </a:solidFill>
+            </a:endParaRPr>
+          </a:p>
+          <a:p>
+            <a:pPr marL="0" indent="0" algn="ctr">
+              <a:buNone/>
+            </a:pPr>
+            <a:r>
+              <a:rPr lang="ko-KR" altLang="en-US" sz="1300" b="1">
+                <a:solidFill>
+                  <a:srgbClr val="1E2761"/>
+                </a:solidFill>
+              </a:rPr>
+              <a:t>실사용</a:t>
+            </a:r>
+            <a:endParaRPr lang="ko-KR" altLang="en-US" sz="1300" b="1" dirty="0">
+              <a:solidFill>
+                <a:srgbClr val="1E2761"/>
+              </a:solidFill>
+            </a:endParaRPr>
+          </a:p>
+          <a:p>
+            <a:pPr marL="0" indent="0" algn="ctr">
+              <a:buNone/>
+            </a:pPr>
+            <a:r>
+              <a:rPr lang="ko-KR" altLang="en-US" sz="1000" dirty="0">
+                <a:solidFill>
+                  <a:srgbClr val="6B7280"/>
+                </a:solidFill>
+              </a:rPr>
+              <a:t>superpowers·라이브</a:t>
+            </a:r>
+          </a:p>
+          <a:p>
+            <a:pPr marL="0" indent="0" algn="ctr">
+              <a:buNone/>
+            </a:pPr>
+            <a:r>
+              <a:rPr lang="ko-KR" altLang="en-US" sz="1000" dirty="0">
+                <a:solidFill>
+                  <a:srgbClr val="6B7280"/>
+                </a:solidFill>
+              </a:rPr>
+              <a:t>바이브코딩 데모</a:t>
+            </a:r>
+          </a:p>
+        </p:txBody>
+      </p:sp>
+      <p:sp>
+        <p:nvSpPr>
+          <p:cNvPr id="90" name="Closing"/>
+          <p:cNvSpPr/>
+          <p:nvPr/>
+        </p:nvSpPr>
+        <p:spPr>
+          <a:xfrm>
+            <a:off x="500000" y="4100000"/>
+            <a:ext cx="8144000" cy="820000"/>
+          </a:xfrm>
+          <a:prstGeom prst="roundRect">
+            <a:avLst>
+              <a:gd name="adj" fmla="val 15000"/>
+            </a:avLst>
+          </a:prstGeom>
+          <a:solidFill>
+            <a:srgbClr val="1E2761"/>
+          </a:solidFill>
+          <a:ln w="19050">
+            <a:solidFill>
+              <a:srgbClr val="A78BFA"/>
+            </a:solidFill>
+          </a:ln>
+        </p:spPr>
+      </p:sp>
+      <p:sp>
+        <p:nvSpPr>
+          <p:cNvPr id="91" name="ClosingText"/>
+          <p:cNvSpPr/>
+          <p:nvPr/>
+        </p:nvSpPr>
+        <p:spPr>
+          <a:xfrm>
+            <a:off x="500000" y="4100000"/>
+            <a:ext cx="8144000" cy="820000"/>
+          </a:xfrm>
+          <a:prstGeom prst="rect">
+            <a:avLst/>
+          </a:prstGeom>
+          <a:noFill/>
+          <a:ln/>
+        </p:spPr>
+        <p:txBody>
+          <a:bodyPr wrap="square" rtlCol="0" anchor="ctr"/>
+          <a:lstStyle/>
+          <a:p>
+            <a:pPr marL="0" indent="0" algn="ctr">
+              <a:buNone/>
+            </a:pPr>
+            <a:r>
+              <a:rPr lang="ko-KR" altLang="en-US" sz="1600" b="1" dirty="0">
+                <a:solidFill>
+                  <a:srgbClr val="C8DCFC"/>
+                </a:solidFill>
+              </a:rPr>
+              <a:t>개념은 정리했으니, </a:t>
+            </a:r>
+            <a:r>
+              <a:rPr lang="ko-KR" altLang="en-US" sz="1600" b="1">
+                <a:solidFill>
+                  <a:srgbClr val="C8DCFC"/>
+                </a:solidFill>
+              </a:rPr>
+              <a:t>이제 하네스 엔지니어링 구성으로 </a:t>
+            </a:r>
+            <a:endParaRPr lang="en-US" sz="1600" dirty="0"/>
+          </a:p>
+        </p:txBody>
+      </p:sp>
+    </p:spTree>
+  </p:cSld>
+  <p:clrMapOvr>
+    <a:masterClrMapping/>
+  </p:clrMapOvr>
+</p:sld>
+</file>
+
+<file path=ppt/slides/slide2.xml><?xml version="1.0" encoding="utf-8"?>
+<p:sld xmlns:a="http://schemas.openxmlformats.org/drawingml/2006/main" xmlns:r="http://schemas.openxmlformats.org/officeDocument/2006/relationships" xmlns:p="http://schemas.openxmlformats.org/presentationml/2006/main">
+  <p:cSld name="Slide 18">
+    <p:bg>
+      <p:bgPr>
+        <a:solidFill>
+          <a:srgbClr val="1A1F3A"/>
+        </a:solidFill>
+        <a:effectLst/>
+      </p:bgPr>
+    </p:bg>
+    <p:spTree>
+      <p:nvGrpSpPr>
+        <p:cNvPr id="1" name=""/>
+        <p:cNvGrpSpPr/>
+        <p:nvPr/>
+      </p:nvGrpSpPr>
+      <p:grpSpPr>
+        <a:xfrm>
+          <a:off x="0" y="0"/>
+          <a:ext cx="0" cy="0"/>
+          <a:chOff x="0" y="0"/>
+          <a:chExt cx="0" cy="0"/>
+        </a:xfrm>
+      </p:grpSpPr>
+      <p:sp>
+        <p:nvSpPr>
+          <p:cNvPr id="2" name="AccentTop"/>
+          <p:cNvSpPr/>
+          <p:nvPr/>
+        </p:nvSpPr>
+        <p:spPr>
+          <a:xfrm>
+            <a:off x="0" y="0"/>
+            <a:ext cx="9144000" cy="64008"/>
+          </a:xfrm>
+          <a:prstGeom prst="rect">
+            <a:avLst/>
+          </a:prstGeom>
+          <a:solidFill>
+            <a:srgbClr val="4FC3F7"/>
+          </a:solidFill>
+          <a:ln w="12700">
+            <a:solidFill>
+              <a:srgbClr val="4FC3F7"/>
+            </a:solidFill>
+          </a:ln>
+        </p:spPr>
+      </p:sp>
+      <p:sp>
+        <p:nvSpPr>
+          <p:cNvPr id="3" name="Kicker"/>
+          <p:cNvSpPr/>
+          <p:nvPr/>
+        </p:nvSpPr>
+        <p:spPr>
+          <a:xfrm>
+            <a:off x="365760" y="640000"/>
+            <a:ext cx="8412480" cy="400000"/>
+          </a:xfrm>
+          <a:prstGeom prst="rect">
+            <a:avLst/>
+          </a:prstGeom>
+          <a:noFill/>
+          <a:ln/>
+        </p:spPr>
+        <p:txBody>
+          <a:bodyPr wrap="square" lIns="0" tIns="0" rIns="0" bIns="0" rtlCol="0" anchor="ctr"/>
+          <a:lstStyle/>
+          <a:p>
+            <a:pPr marL="0" indent="0" algn="ctr">
+              <a:buNone/>
+            </a:pPr>
+            <a:r>
+              <a:rPr lang="ko-KR" altLang="en-US" sz="1400" b="1" i="1" dirty="0">
+                <a:solidFill>
+                  <a:srgbClr val="4FC3F7"/>
+                </a:solidFill>
+              </a:rPr>
+              <a:t>오늘의 한 문장</a:t>
+            </a:r>
+            <a:endParaRPr lang="en-US" sz="1400" dirty="0"/>
+          </a:p>
+        </p:txBody>
+      </p:sp>
+      <p:sp>
+        <p:nvSpPr>
+          <p:cNvPr id="4" name="Line1"/>
+          <p:cNvSpPr/>
+          <p:nvPr/>
+        </p:nvSpPr>
+        <p:spPr>
+          <a:xfrm>
+            <a:off x="365760" y="1250000"/>
+            <a:ext cx="8412480" cy="900000"/>
+          </a:xfrm>
+          <a:prstGeom prst="rect">
+            <a:avLst/>
+          </a:prstGeom>
+          <a:noFill/>
+          <a:ln/>
+        </p:spPr>
+        <p:txBody>
+          <a:bodyPr wrap="square" lIns="0" tIns="0" rIns="0" bIns="0" rtlCol="0" anchor="ctr"/>
+          <a:lstStyle/>
+          <a:p>
+            <a:pPr marL="0" indent="0" algn="ctr">
+              <a:buNone/>
+            </a:pPr>
+            <a:r>
+              <a:rPr lang="ko-KR" altLang="en-US" sz="3600" b="1" dirty="0">
+                <a:solidFill>
+                  <a:srgbClr val="FFFFFF"/>
+                </a:solidFill>
+                <a:latin typeface="Arial Black" pitchFamily="34" charset="0"/>
+                <a:ea typeface="Arial Black" pitchFamily="34" charset="-122"/>
+                <a:cs typeface="Arial Black" pitchFamily="34" charset="-120"/>
+              </a:rPr>
+              <a:t>코드 짜는 능력이 아니라, </a:t>
+            </a:r>
+            <a:endParaRPr lang="en-US" sz="3600" dirty="0"/>
+          </a:p>
+        </p:txBody>
+      </p:sp>
+      <p:sp>
+        <p:nvSpPr>
+          <p:cNvPr id="5" name="Line2"/>
+          <p:cNvSpPr/>
+          <p:nvPr/>
+        </p:nvSpPr>
+        <p:spPr>
+          <a:xfrm>
+            <a:off x="365760" y="2200000"/>
+            <a:ext cx="8412480" cy="900000"/>
+          </a:xfrm>
+          <a:prstGeom prst="rect">
+            <a:avLst/>
+          </a:prstGeom>
+          <a:noFill/>
+          <a:ln/>
+        </p:spPr>
+        <p:txBody>
+          <a:bodyPr wrap="square" lIns="0" tIns="0" rIns="0" bIns="0" rtlCol="0" anchor="ctr"/>
+          <a:lstStyle/>
+          <a:p>
+            <a:pPr marL="0" indent="0" algn="ctr">
+              <a:buNone/>
+            </a:pPr>
+            <a:r>
+              <a:rPr lang="ko-KR" altLang="en-US" sz="4400" b="1" dirty="0">
+                <a:solidFill>
+                  <a:srgbClr val="4FC3F7"/>
+                </a:solidFill>
+                <a:latin typeface="Arial Black" pitchFamily="34" charset="0"/>
+                <a:ea typeface="Arial Black" pitchFamily="34" charset="-122"/>
+                <a:cs typeface="Arial Black" pitchFamily="34" charset="-120"/>
+              </a:rPr>
+              <a:t>문서를 쓰는 능력</a:t>
+            </a:r>
+            <a:r>
+              <a:rPr lang="ko-KR" altLang="en-US" sz="4400" b="1" dirty="0">
+                <a:solidFill>
+                  <a:srgbClr val="FFFFFF"/>
+                </a:solidFill>
+                <a:latin typeface="Arial Black" pitchFamily="34" charset="0"/>
+                <a:ea typeface="Arial Black" pitchFamily="34" charset="-122"/>
+                <a:cs typeface="Arial Black" pitchFamily="34" charset="-120"/>
+              </a:rPr>
+              <a:t>이</a:t>
+            </a:r>
+            <a:endParaRPr lang="en-US" sz="4400" dirty="0"/>
+          </a:p>
+        </p:txBody>
+      </p:sp>
+      <p:sp>
+        <p:nvSpPr>
+          <p:cNvPr id="6" name="Line3"/>
+          <p:cNvSpPr/>
+          <p:nvPr/>
+        </p:nvSpPr>
+        <p:spPr>
+          <a:xfrm>
+            <a:off x="365760" y="3150000"/>
+            <a:ext cx="8412480" cy="900000"/>
+          </a:xfrm>
+          <a:prstGeom prst="rect">
+            <a:avLst/>
+          </a:prstGeom>
+          <a:noFill/>
+          <a:ln/>
+        </p:spPr>
+        <p:txBody>
+          <a:bodyPr wrap="square" lIns="0" tIns="0" rIns="0" bIns="0" rtlCol="0" anchor="ctr"/>
+          <a:lstStyle/>
+          <a:p>
+            <a:pPr marL="0" indent="0" algn="ctr">
+              <a:buNone/>
+            </a:pPr>
+            <a:r>
+              <a:rPr lang="ko-KR" altLang="en-US" sz="3600" b="1">
+                <a:solidFill>
+                  <a:srgbClr val="FFFFFF"/>
+                </a:solidFill>
+                <a:latin typeface="Arial Black" pitchFamily="34" charset="0"/>
+                <a:ea typeface="Arial Black" pitchFamily="34" charset="-122"/>
+                <a:cs typeface="Arial Black" pitchFamily="34" charset="-120"/>
+              </a:rPr>
+              <a:t>A</a:t>
+            </a:r>
+            <a:r>
+              <a:rPr lang="en-US" altLang="ko-KR" sz="3600" b="1">
+                <a:solidFill>
+                  <a:srgbClr val="FFFFFF"/>
+                </a:solidFill>
+                <a:latin typeface="Arial Black" pitchFamily="34" charset="0"/>
+                <a:ea typeface="Arial Black" pitchFamily="34" charset="-122"/>
+                <a:cs typeface="Arial Black" pitchFamily="34" charset="-120"/>
+              </a:rPr>
+              <a:t>I </a:t>
+            </a:r>
+            <a:r>
+              <a:rPr lang="ko-KR" altLang="en-US" sz="3600" b="1">
+                <a:solidFill>
+                  <a:srgbClr val="FFFFFF"/>
+                </a:solidFill>
+                <a:latin typeface="Arial Black" pitchFamily="34" charset="0"/>
+                <a:ea typeface="Arial Black" pitchFamily="34" charset="-122"/>
+                <a:cs typeface="Arial Black" pitchFamily="34" charset="-120"/>
+              </a:rPr>
+              <a:t>시대의 핵심 역량</a:t>
+            </a:r>
+            <a:endParaRPr lang="en-US" sz="3600" dirty="0"/>
+          </a:p>
+        </p:txBody>
+      </p:sp>
+      <p:sp>
+        <p:nvSpPr>
+          <p:cNvPr id="7" name="Preview"/>
+          <p:cNvSpPr/>
+          <p:nvPr/>
+        </p:nvSpPr>
+        <p:spPr>
+          <a:xfrm>
+            <a:off x="365760" y="4300000"/>
+            <a:ext cx="8412480" cy="500000"/>
+          </a:xfrm>
+          <a:prstGeom prst="rect">
+            <a:avLst/>
+          </a:prstGeom>
+          <a:noFill/>
+          <a:ln/>
+        </p:spPr>
+        <p:txBody>
+          <a:bodyPr wrap="square" lIns="0" tIns="0" rIns="0" bIns="0" rtlCol="0" anchor="ctr"/>
+          <a:lstStyle/>
+          <a:p>
+            <a:pPr marL="0" indent="0" algn="ctr">
+              <a:buNone/>
+            </a:pPr>
+            <a:r>
+              <a:rPr lang="ko-KR" altLang="en-US" sz="1400" i="1" dirty="0">
+                <a:solidFill>
+                  <a:srgbClr val="8899BB"/>
+                </a:solidFill>
+              </a:rPr>
+              <a:t>이 한 문장에 도착하기까지 </a:t>
+            </a:r>
+            <a:r>
+              <a:rPr lang="en-US" sz="1400" b="1" i="1" dirty="0">
+                <a:solidFill>
+                  <a:srgbClr val="C8DCFC"/>
+                </a:solidFill>
+              </a:rPr>
+              <a:t>3단계</a:t>
+            </a:r>
+            <a:r>
+              <a:rPr lang="ko-KR" altLang="en-US" sz="1400" i="1" dirty="0">
+                <a:solidFill>
+                  <a:srgbClr val="8899BB"/>
+                </a:solidFill>
+              </a:rPr>
+              <a:t>를 밟아봅니다  </a:t>
+            </a:r>
+            <a:r>
+              <a:rPr lang="en-US" sz="1400" i="1" dirty="0">
+                <a:solidFill>
+                  <a:srgbClr val="4FC3F7"/>
+                </a:solidFill>
+              </a:rPr>
+              <a:t>—  바이브코딩 → 프롬프트 → 하네스</a:t>
+            </a:r>
+            <a:endParaRPr lang="en-US" sz="1400" dirty="0"/>
+          </a:p>
+        </p:txBody>
+      </p:sp>
+    </p:spTree>
+  </p:cSld>
+  <p:clrMapOvr>
+    <a:masterClrMapping/>
+  </p:clrMapOvr>
+</p:sld>
+</file>
+
+<file path=ppt/slides/slide3.xml><?xml version="1.0" encoding="utf-8"?>
 <p:sld xmlns:a="http://schemas.openxmlformats.org/drawingml/2006/main" xmlns:r="http://schemas.openxmlformats.org/officeDocument/2006/relationships" xmlns:p="http://schemas.openxmlformats.org/presentationml/2006/main">
   <p:cSld name="Slide 17">
     <p:bg>
@@ -1853,7 +2702,7 @@
                   <a:srgbClr val="6B7280"/>
                 </a:solidFill>
               </a:rPr>
-              <a:t xml:space="preserve"> </a:t>
+              <a:t> </a:t>
             </a:r>
             <a:endParaRPr lang="en-US" sz="1200" dirty="0"/>
           </a:p>
@@ -1943,7 +2792,7 @@
                   <a:srgbClr val="1E2761"/>
                 </a:solidFill>
               </a:rPr>
-              <a:t xml:space="preserve">이제 코드를 몰라도 만들 수 있다.  </a:t>
+              <a:t>이제 코드를 몰라도 만들 수 있다.  </a:t>
             </a:r>
             <a:r>
               <a:rPr lang="ko-KR" altLang="en-US" sz="1500" b="1" dirty="0">
@@ -1965,288 +2814,7 @@
 </p:sld>
 </file>
 
-<file path=ppt/slides/slide18.xml><?xml version="1.0" encoding="utf-8"?>
-<p:sld xmlns:a="http://schemas.openxmlformats.org/drawingml/2006/main" xmlns:r="http://schemas.openxmlformats.org/officeDocument/2006/relationships" xmlns:p="http://schemas.openxmlformats.org/presentationml/2006/main">
-  <p:cSld name="Slide 18">
-    <p:bg>
-      <p:bgPr>
-        <a:solidFill>
-          <a:srgbClr val="1A1F3A"/>
-        </a:solidFill>
-        <a:effectLst/>
-      </p:bgPr>
-    </p:bg>
-    <p:spTree>
-      <p:nvGrpSpPr>
-        <p:cNvPr id="1" name=""/>
-        <p:cNvGrpSpPr/>
-        <p:nvPr/>
-      </p:nvGrpSpPr>
-      <p:grpSpPr>
-        <a:xfrm>
-          <a:off x="0" y="0"/>
-          <a:ext cx="0" cy="0"/>
-          <a:chOff x="0" y="0"/>
-          <a:chExt cx="0" cy="0"/>
-        </a:xfrm>
-      </p:grpSpPr>
-      <p:sp>
-        <p:nvSpPr>
-          <p:cNvPr id="2" name="AccentTop"/>
-          <p:cNvSpPr/>
-          <p:nvPr/>
-        </p:nvSpPr>
-        <p:spPr>
-          <a:xfrm>
-            <a:off x="0" y="0"/>
-            <a:ext cx="9144000" cy="64008"/>
-          </a:xfrm>
-          <a:prstGeom prst="rect">
-            <a:avLst/>
-          </a:prstGeom>
-          <a:solidFill>
-            <a:srgbClr val="4FC3F7"/>
-          </a:solidFill>
-          <a:ln w="12700">
-            <a:solidFill>
-              <a:srgbClr val="4FC3F7"/>
-            </a:solidFill>
-          </a:ln>
-        </p:spPr>
-      </p:sp>
-      <p:sp>
-        <p:nvSpPr>
-          <p:cNvPr id="3" name="Kicker"/>
-          <p:cNvSpPr/>
-          <p:nvPr/>
-        </p:nvSpPr>
-        <p:spPr>
-          <a:xfrm>
-            <a:off x="365760" y="640000"/>
-            <a:ext cx="8412480" cy="400000"/>
-          </a:xfrm>
-          <a:prstGeom prst="rect">
-            <a:avLst/>
-          </a:prstGeom>
-          <a:noFill/>
-          <a:ln/>
-        </p:spPr>
-        <p:txBody>
-          <a:bodyPr wrap="square" lIns="0" tIns="0" rIns="0" bIns="0" rtlCol="0" anchor="ctr"/>
-          <a:lstStyle/>
-          <a:p>
-            <a:pPr marL="0" indent="0" algn="ctr">
-              <a:buNone/>
-            </a:pPr>
-            <a:r>
-              <a:rPr lang="ko-KR" altLang="en-US" sz="1400" b="1" i="1" dirty="0">
-                <a:solidFill>
-                  <a:srgbClr val="4FC3F7"/>
-                </a:solidFill>
-              </a:rPr>
-              <a:t>오늘의 한 문장</a:t>
-            </a:r>
-            <a:endParaRPr lang="en-US" sz="1400" dirty="0"/>
-          </a:p>
-        </p:txBody>
-      </p:sp>
-      <p:sp>
-        <p:nvSpPr>
-          <p:cNvPr id="4" name="Line1"/>
-          <p:cNvSpPr/>
-          <p:nvPr/>
-        </p:nvSpPr>
-        <p:spPr>
-          <a:xfrm>
-            <a:off x="365760" y="1250000"/>
-            <a:ext cx="8412480" cy="900000"/>
-          </a:xfrm>
-          <a:prstGeom prst="rect">
-            <a:avLst/>
-          </a:prstGeom>
-          <a:noFill/>
-          <a:ln/>
-        </p:spPr>
-        <p:txBody>
-          <a:bodyPr wrap="square" lIns="0" tIns="0" rIns="0" bIns="0" rtlCol="0" anchor="ctr"/>
-          <a:lstStyle/>
-          <a:p>
-            <a:pPr marL="0" indent="0" algn="ctr">
-              <a:buNone/>
-            </a:pPr>
-            <a:r>
-              <a:rPr lang="ko-KR" altLang="en-US" sz="3600" b="1" dirty="0">
-                <a:solidFill>
-                  <a:srgbClr val="FFFFFF"/>
-                </a:solidFill>
-                <a:latin typeface="Arial Black" pitchFamily="34" charset="0"/>
-                <a:ea typeface="Arial Black" pitchFamily="34" charset="-122"/>
-                <a:cs typeface="Arial Black" pitchFamily="34" charset="-120"/>
-              </a:rPr>
-              <a:t xml:space="preserve">코드 짜는 능력이 아니라, </a:t>
-            </a:r>
-            <a:endParaRPr lang="en-US" sz="3600" dirty="0"/>
-          </a:p>
-        </p:txBody>
-      </p:sp>
-      <p:sp>
-        <p:nvSpPr>
-          <p:cNvPr id="5" name="Line2"/>
-          <p:cNvSpPr/>
-          <p:nvPr/>
-        </p:nvSpPr>
-        <p:spPr>
-          <a:xfrm>
-            <a:off x="365760" y="2200000"/>
-            <a:ext cx="8412480" cy="900000"/>
-          </a:xfrm>
-          <a:prstGeom prst="rect">
-            <a:avLst/>
-          </a:prstGeom>
-          <a:noFill/>
-          <a:ln/>
-        </p:spPr>
-        <p:txBody>
-          <a:bodyPr wrap="square" lIns="0" tIns="0" rIns="0" bIns="0" rtlCol="0" anchor="ctr"/>
-          <a:lstStyle/>
-          <a:p>
-            <a:pPr marL="0" indent="0" algn="ctr">
-              <a:buNone/>
-            </a:pPr>
-            <a:r>
-              <a:rPr lang="ko-KR" altLang="en-US" sz="4400" b="1" dirty="0">
-                <a:solidFill>
-                  <a:srgbClr val="4FC3F7"/>
-                </a:solidFill>
-                <a:latin typeface="Arial Black" pitchFamily="34" charset="0"/>
-                <a:ea typeface="Arial Black" pitchFamily="34" charset="-122"/>
-                <a:cs typeface="Arial Black" pitchFamily="34" charset="-120"/>
-              </a:rPr>
-              <a:t>문서를 쓰는 능력</a:t>
-            </a:r>
-            <a:r>
-              <a:rPr lang="ko-KR" altLang="en-US" sz="4400" b="1" dirty="0">
-                <a:solidFill>
-                  <a:srgbClr val="FFFFFF"/>
-                </a:solidFill>
-                <a:latin typeface="Arial Black" pitchFamily="34" charset="0"/>
-                <a:ea typeface="Arial Black" pitchFamily="34" charset="-122"/>
-                <a:cs typeface="Arial Black" pitchFamily="34" charset="-120"/>
-              </a:rPr>
-              <a:t>이</a:t>
-            </a:r>
-            <a:endParaRPr lang="en-US" sz="4400" dirty="0"/>
-          </a:p>
-        </p:txBody>
-      </p:sp>
-      <p:sp>
-        <p:nvSpPr>
-          <p:cNvPr id="6" name="Line3"/>
-          <p:cNvSpPr/>
-          <p:nvPr/>
-        </p:nvSpPr>
-        <p:spPr>
-          <a:xfrm>
-            <a:off x="365760" y="3150000"/>
-            <a:ext cx="8412480" cy="900000"/>
-          </a:xfrm>
-          <a:prstGeom prst="rect">
-            <a:avLst/>
-          </a:prstGeom>
-          <a:noFill/>
-          <a:ln/>
-        </p:spPr>
-        <p:txBody>
-          <a:bodyPr wrap="square" lIns="0" tIns="0" rIns="0" bIns="0" rtlCol="0" anchor="ctr"/>
-          <a:lstStyle/>
-          <a:p>
-            <a:pPr marL="0" indent="0" algn="ctr">
-              <a:buNone/>
-            </a:pPr>
-            <a:r>
-              <a:rPr lang="ko-KR" altLang="en-US" sz="3600" b="1" dirty="0">
-                <a:solidFill>
-                  <a:srgbClr val="FFFFFF"/>
-                </a:solidFill>
-                <a:latin typeface="Arial Black" pitchFamily="34" charset="0"/>
-                <a:ea typeface="Arial Black" pitchFamily="34" charset="-122"/>
-                <a:cs typeface="Arial Black" pitchFamily="34" charset="-120"/>
-              </a:rPr>
-              <a:t>AI 시대의 핵심 역량이다.</a:t>
-            </a:r>
-            <a:endParaRPr lang="en-US" sz="3600" dirty="0"/>
-          </a:p>
-        </p:txBody>
-      </p:sp>
-      <p:sp>
-        <p:nvSpPr>
-          <p:cNvPr id="7" name="Preview"/>
-          <p:cNvSpPr/>
-          <p:nvPr/>
-        </p:nvSpPr>
-        <p:spPr>
-          <a:xfrm>
-            <a:off x="365760" y="4300000"/>
-            <a:ext cx="8412480" cy="500000"/>
-          </a:xfrm>
-          <a:prstGeom prst="rect">
-            <a:avLst/>
-          </a:prstGeom>
-          <a:noFill/>
-          <a:ln/>
-        </p:spPr>
-        <p:txBody>
-          <a:bodyPr wrap="square" lIns="0" tIns="0" rIns="0" bIns="0" rtlCol="0" anchor="ctr"/>
-          <a:lstStyle/>
-          <a:p>
-            <a:pPr marL="0" indent="0" algn="ctr">
-              <a:buNone/>
-            </a:pPr>
-            <a:r>
-              <a:rPr lang="ko-KR" altLang="en-US" sz="1400" i="1" dirty="0">
-                <a:solidFill>
-                  <a:srgbClr val="8899BB"/>
-                </a:solidFill>
-              </a:rPr>
-              <a:t xml:space="preserve">이 한 문장에 도착하기까지 </a:t>
-            </a:r>
-            <a:r>
-              <a:rPr lang="en-US" sz="1400" b="1" i="1" dirty="0">
-                <a:solidFill>
-                  <a:srgbClr val="C8DCFC"/>
-                </a:solidFill>
-              </a:rPr>
-              <a:t>3단계</a:t>
-            </a:r>
-            <a:r>
-              <a:rPr lang="ko-KR" altLang="en-US" sz="1400" i="1" dirty="0">
-                <a:solidFill>
-                  <a:srgbClr val="8899BB"/>
-                </a:solidFill>
-              </a:rPr>
-              <a:t xml:space="preserve">를 밟아봅니다  </a:t>
-            </a:r>
-            <a:r>
-              <a:rPr lang="en-US" sz="1400" i="1" dirty="0">
-                <a:solidFill>
-                  <a:srgbClr val="4FC3F7"/>
-                </a:solidFill>
-              </a:rPr>
-              <a:t>—  바이브코딩 → 프롬프트 → 하네스</a:t>
-            </a:r>
-            <a:endParaRPr lang="en-US" sz="1400" dirty="0"/>
-          </a:p>
-        </p:txBody>
-      </p:sp>
-    </p:spTree>
-  </p:cSld>
-  <p:clrMapOvr>
-    <a:masterClrMapping/>
-  </p:clrMapOvr>
-</p:sld>
-</file>
-
-<file path=ppt/slides/slide19.xml><?xml version="1.0" encoding="utf-8"?>
+<file path=ppt/slides/slide4.xml><?xml version="1.0" encoding="utf-8"?>
 <p:sld xmlns:a="http://schemas.openxmlformats.org/drawingml/2006/main" xmlns:r="http://schemas.openxmlformats.org/officeDocument/2006/relationships" xmlns:p="http://schemas.openxmlformats.org/presentationml/2006/main">
   <p:cSld name="Slide 19">
     <p:bg>
@@ -2755,7 +3323,7 @@
                   <a:srgbClr val="1E2761"/>
                 </a:solidFill>
               </a:rPr>
-              <a:t xml:space="preserve">→  그럼 </a:t>
+              <a:t>→  그럼 </a:t>
             </a:r>
             <a:r>
               <a:rPr lang="ko-KR" altLang="en-US" sz="1500" b="1" dirty="0">
@@ -2785,7 +3353,7 @@
 </p:sld>
 </file>
 
-<file path=ppt/slides/slide20.xml><?xml version="1.0" encoding="utf-8"?>
+<file path=ppt/slides/slide5.xml><?xml version="1.0" encoding="utf-8"?>
 <p:sld xmlns:a="http://schemas.openxmlformats.org/drawingml/2006/main" xmlns:r="http://schemas.openxmlformats.org/officeDocument/2006/relationships" xmlns:p="http://schemas.openxmlformats.org/presentationml/2006/main">
   <p:cSld name="Slide 20">
     <p:bg>
@@ -3070,7 +3638,7 @@
                   <a:srgbClr val="6B7280"/>
                 </a:solidFill>
               </a:rPr>
-              <a:t xml:space="preserve">   내 의도·규칙을 AI가 알아듣게 전달</a:t>
+              <a:t>   내 의도·규칙을 AI가 알아듣게 전달</a:t>
             </a:r>
           </a:p>
           <a:p>
@@ -3091,7 +3659,7 @@
                   <a:srgbClr val="6B7280"/>
                 </a:solidFill>
               </a:rPr>
-              <a:t xml:space="preserve">   모르는 걸 AI에게 캐물어 사전지식 끌어내기</a:t>
+              <a:t>   모르는 걸 AI에게 캐물어 사전지식 끌어내기</a:t>
             </a:r>
           </a:p>
         </p:txBody>
@@ -3152,7 +3720,7 @@
                   <a:srgbClr val="1E2761"/>
                 </a:solidFill>
               </a:rPr>
-              <a:t xml:space="preserve">잘 시키는 법에는 </a:t>
+              <a:t>잘 시키는 법에는 </a:t>
             </a:r>
             <a:r>
               <a:rPr lang="ko-KR" altLang="en-US" sz="1500" b="1" dirty="0">
@@ -3182,7 +3750,7 @@
 </p:sld>
 </file>
 
-<file path=ppt/slides/slide21.xml><?xml version="1.0" encoding="utf-8"?>
+<file path=ppt/slides/slide6.xml><?xml version="1.0" encoding="utf-8"?>
 <p:sld xmlns:a="http://schemas.openxmlformats.org/drawingml/2006/main" xmlns:r="http://schemas.openxmlformats.org/officeDocument/2006/relationships" xmlns:p="http://schemas.openxmlformats.org/presentationml/2006/main">
   <p:cSld name="Slide 21">
     <p:bg>
@@ -3371,14 +3939,6 @@
             <a:pPr marL="0" indent="0">
               <a:buNone/>
             </a:pPr>
-            <a:r>
-              <a:rPr lang="ko-KR" altLang="en-US" sz="1600" i="1" dirty="0">
-                <a:solidFill>
-                  <a:srgbClr val="6B7280"/>
-                </a:solidFill>
-              </a:rPr>
-              <a:t/>
-            </a:r>
             <a:endParaRPr lang="en-US" sz="1600" dirty="0"/>
           </a:p>
         </p:txBody>
@@ -3771,7 +4331,7 @@
                   <a:srgbClr val="1E2761"/>
                 </a:solidFill>
               </a:rPr>
-              <a:t xml:space="preserve">이 4가지가 </a:t>
+              <a:t>이 4가지가 </a:t>
             </a:r>
             <a:r>
               <a:rPr lang="ko-KR" altLang="en-US" sz="1500" b="1" dirty="0">
@@ -3787,7 +4347,7 @@
                   <a:srgbClr val="1E2761"/>
                 </a:solidFill>
               </a:rPr>
-              <a:t xml:space="preserve">는 결과가 안 흔들린다  </a:t>
+              <a:t>는 결과가 안 흔들린다  </a:t>
             </a:r>
             <a:r>
               <a:rPr lang="ko-KR" altLang="en-US" sz="1500" b="1" dirty="0">
@@ -3809,7 +4369,7 @@
 </p:sld>
 </file>
 
-<file path=ppt/slides/slide22.xml><?xml version="1.0" encoding="utf-8"?>
+<file path=ppt/slides/slide7.xml><?xml version="1.0" encoding="utf-8"?>
 <p:sld xmlns:a="http://schemas.openxmlformats.org/drawingml/2006/main" xmlns:r="http://schemas.openxmlformats.org/officeDocument/2006/relationships" xmlns:p="http://schemas.openxmlformats.org/presentationml/2006/main">
   <p:cSld name="Slide 22">
     <p:bg>
@@ -4173,7 +4733,7 @@
                   <a:srgbClr val="1E2761"/>
                 </a:solidFill>
               </a:rPr>
-              <a:t xml:space="preserve">→  말버릇이 아니라 </a:t>
+              <a:t>→  말버릇이 아니라 </a:t>
             </a:r>
             <a:r>
               <a:rPr lang="ko-KR" altLang="en-US" sz="1500" b="1" dirty="0">
@@ -4189,7 +4749,7 @@
                   <a:srgbClr val="1E2761"/>
                 </a:solidFill>
               </a:rPr>
-              <a:t xml:space="preserve"> 팀·시간에 남는다</a:t>
+              <a:t> 팀·시간에 남는다</a:t>
             </a:r>
             <a:endParaRPr lang="en-US" sz="1500" dirty="0"/>
           </a:p>
@@ -4203,7 +4763,7 @@
 </p:sld>
 </file>
 
-<file path=ppt/slides/slide23.xml><?xml version="1.0" encoding="utf-8"?>
+<file path=ppt/slides/slide8.xml><?xml version="1.0" encoding="utf-8"?>
 <p:sld xmlns:a="http://schemas.openxmlformats.org/drawingml/2006/main" xmlns:r="http://schemas.openxmlformats.org/officeDocument/2006/relationships" xmlns:p="http://schemas.openxmlformats.org/presentationml/2006/main">
   <p:cSld name="Slide 23">
     <p:bg>
@@ -4493,7 +5053,7 @@
                   <a:srgbClr val="1E2761"/>
                 </a:solidFill>
               </a:rPr>
-              <a:t xml:space="preserve">정해진 방향으로만 쓰이도록 </a:t>
+              <a:t>정해진 방향으로만 쓰이도록 </a:t>
             </a:r>
             <a:r>
               <a:rPr lang="ko-KR" altLang="en-US" sz="1300" b="1" dirty="0">
@@ -4575,7 +5135,7 @@
                   <a:srgbClr val="1E2761"/>
                 </a:solidFill>
               </a:rPr>
-              <a:t xml:space="preserve">개인기가 아니라 </a:t>
+              <a:t>개인기가 아니라 </a:t>
             </a:r>
             <a:r>
               <a:rPr lang="ko-KR" altLang="en-US" sz="1500" b="1" dirty="0">
@@ -4591,7 +5151,7 @@
                   <a:srgbClr val="1E2761"/>
                 </a:solidFill>
               </a:rPr>
-              <a:t xml:space="preserve"> · 무엇을 문서로 굳히나?</a:t>
+              <a:t> · 무엇을 문서로 굳히나?</a:t>
             </a:r>
             <a:endParaRPr lang="en-US" sz="1500" dirty="0"/>
           </a:p>
@@ -4605,7 +5165,7 @@
 </p:sld>
 </file>
 
-<file path=ppt/slides/slide24.xml><?xml version="1.0" encoding="utf-8"?>
+<file path=ppt/slides/slide9.xml><?xml version="1.0" encoding="utf-8"?>
 <p:sld xmlns:a="http://schemas.openxmlformats.org/drawingml/2006/main" xmlns:r="http://schemas.openxmlformats.org/officeDocument/2006/relationships" xmlns:p="http://schemas.openxmlformats.org/presentationml/2006/main">
   <p:cSld name="Slide 24">
     <p:bg>
@@ -4794,14 +5354,6 @@
             <a:pPr marL="0" indent="0">
               <a:buNone/>
             </a:pPr>
-            <a:r>
-              <a:rPr lang="ko-KR" altLang="en-US" sz="1600" i="1" dirty="0">
-                <a:solidFill>
-                  <a:srgbClr val="6B7280"/>
-                </a:solidFill>
-              </a:rPr>
-              <a:t/>
-            </a:r>
             <a:endParaRPr lang="en-US" sz="1600" dirty="0"/>
           </a:p>
         </p:txBody>
@@ -5194,7 +5746,7 @@
                   <a:srgbClr val="1E2761"/>
                 </a:solidFill>
               </a:rPr>
-              <a:t xml:space="preserve">이 흐름을 </a:t>
+              <a:t>이 흐름을 </a:t>
             </a:r>
             <a:r>
               <a:rPr lang="ko-KR" altLang="en-US" sz="1500" b="1" dirty="0">
@@ -5210,579 +5762,9 @@
                   <a:srgbClr val="1E2761"/>
                 </a:solidFill>
               </a:rPr>
-              <a:t xml:space="preserve">, 누가 언제 실행해도 재현된다</a:t>
+              <a:t>, 누가 언제 실행해도 재현된다</a:t>
             </a:r>
             <a:endParaRPr lang="en-US" sz="1500" dirty="0"/>
-          </a:p>
-        </p:txBody>
-      </p:sp>
-    </p:spTree>
-  </p:cSld>
-  <p:clrMapOvr>
-    <a:masterClrMapping/>
-  </p:clrMapOvr>
-</p:sld>
-</file>
-
-<file path=ppt/slides/slide25.xml><?xml version="1.0" encoding="utf-8"?>
-<p:sld xmlns:a="http://schemas.openxmlformats.org/drawingml/2006/main" xmlns:r="http://schemas.openxmlformats.org/officeDocument/2006/relationships" xmlns:p="http://schemas.openxmlformats.org/presentationml/2006/main">
-  <p:cSld name="Slide 25">
-    <p:bg>
-      <p:bgPr>
-        <a:solidFill>
-          <a:srgbClr val="F4F7FE"/>
-        </a:solidFill>
-        <a:effectLst/>
-      </p:bgPr>
-    </p:bg>
-    <p:spTree>
-      <p:nvGrpSpPr>
-        <p:cNvPr id="1" name=""/>
-        <p:cNvGrpSpPr/>
-        <p:nvPr/>
-      </p:nvGrpSpPr>
-      <p:grpSpPr>
-        <a:xfrm>
-          <a:off x="0" y="0"/>
-          <a:ext cx="0" cy="0"/>
-          <a:chOff x="0" y="0"/>
-          <a:chExt cx="0" cy="0"/>
-        </a:xfrm>
-      </p:grpSpPr>
-      <p:sp>
-        <p:nvSpPr>
-          <p:cNvPr id="2" name="LeftBar"/>
-          <p:cNvSpPr/>
-          <p:nvPr/>
-        </p:nvSpPr>
-        <p:spPr>
-          <a:xfrm>
-            <a:off x="0" y="0"/>
-            <a:ext cx="73152" cy="5143500"/>
-          </a:xfrm>
-          <a:prstGeom prst="rect">
-            <a:avLst/>
-          </a:prstGeom>
-          <a:solidFill>
-            <a:srgbClr val="A78BFA"/>
-          </a:solidFill>
-          <a:ln w="12700">
-            <a:solidFill>
-              <a:srgbClr val="A78BFA"/>
-            </a:solidFill>
-          </a:ln>
-        </p:spPr>
-      </p:sp>
-      <p:sp>
-        <p:nvSpPr>
-          <p:cNvPr id="3" name="Kicker"/>
-          <p:cNvSpPr/>
-          <p:nvPr/>
-        </p:nvSpPr>
-        <p:spPr>
-          <a:xfrm>
-            <a:off x="500000" y="330000"/>
-            <a:ext cx="5000000" cy="300000"/>
-          </a:xfrm>
-          <a:prstGeom prst="rect">
-            <a:avLst/>
-          </a:prstGeom>
-          <a:noFill/>
-          <a:ln/>
-        </p:spPr>
-        <p:txBody>
-          <a:bodyPr wrap="square" lIns="0" tIns="0" rIns="0" bIns="0" rtlCol="0" anchor="ctr"/>
-          <a:lstStyle/>
-          <a:p>
-            <a:pPr marL="0" indent="0">
-              <a:buNone/>
-            </a:pPr>
-            <a:r>
-              <a:rPr lang="en-US" sz="1400" b="1" dirty="0">
-                <a:solidFill>
-                  <a:srgbClr val="A78BFA"/>
-                </a:solidFill>
-              </a:rPr>
-              <a:t>NEXT  ·  다음 파트 예고</a:t>
-            </a:r>
-            <a:endParaRPr lang="en-US" sz="1400" dirty="0"/>
-          </a:p>
-        </p:txBody>
-      </p:sp>
-      <p:sp>
-        <p:nvSpPr>
-          <p:cNvPr id="4" name="Title"/>
-          <p:cNvSpPr/>
-          <p:nvPr/>
-        </p:nvSpPr>
-        <p:spPr>
-          <a:xfrm>
-            <a:off x="500000" y="750000"/>
-            <a:ext cx="8144000" cy="700000"/>
-          </a:xfrm>
-          <a:prstGeom prst="rect">
-            <a:avLst/>
-          </a:prstGeom>
-          <a:noFill/>
-          <a:ln/>
-        </p:spPr>
-        <p:txBody>
-          <a:bodyPr wrap="square" lIns="0" tIns="0" rIns="0" bIns="0" rtlCol="0" anchor="ctr"/>
-          <a:lstStyle/>
-          <a:p>
-            <a:pPr marL="0" indent="0">
-              <a:buNone/>
-            </a:pPr>
-            <a:r>
-              <a:rPr lang="ko-KR" altLang="en-US" sz="3600" b="1" dirty="0">
-                <a:solidFill>
-                  <a:srgbClr val="1E2761"/>
-                </a:solidFill>
-                <a:latin typeface="Arial Black" pitchFamily="34" charset="0"/>
-                <a:ea typeface="Arial Black" pitchFamily="34" charset="-122"/>
-                <a:cs typeface="Arial Black" pitchFamily="34" charset="-120"/>
-              </a:rPr>
-              <a:t>그 문서, 실제로 어떻게 생겼나?</a:t>
-            </a:r>
-            <a:endParaRPr lang="en-US" sz="3600" dirty="0"/>
-          </a:p>
-        </p:txBody>
-      </p:sp>
-      <p:sp>
-        <p:nvSpPr>
-          <p:cNvPr id="10" name="Card1"/>
-          <p:cNvSpPr/>
-          <p:nvPr/>
-        </p:nvSpPr>
-        <p:spPr>
-          <a:xfrm>
-            <a:off x="500000" y="1750000"/>
-            <a:ext cx="2680000" cy="2100000"/>
-          </a:xfrm>
-          <a:prstGeom prst="roundRect">
-            <a:avLst>
-              <a:gd name="adj" fmla="val 8000"/>
-            </a:avLst>
-          </a:prstGeom>
-          <a:solidFill>
-            <a:srgbClr val="FFFFFF"/>
-          </a:solidFill>
-          <a:ln w="19050">
-            <a:solidFill>
-              <a:srgbClr val="4FC3F7"/>
-            </a:solidFill>
-          </a:ln>
-          <a:effectLst>
-            <a:outerShdw blurRad="76200" dist="12700" dir="8100000" algn="bl" rotWithShape="0">
-              <a:srgbClr val="000000">
-                <a:alpha val="12000"/>
-              </a:srgbClr>
-            </a:outerShdw>
-          </a:effectLst>
-        </p:spPr>
-      </p:sp>
-      <p:sp>
-        <p:nvSpPr>
-          <p:cNvPr id="11" name="Card1T"/>
-          <p:cNvSpPr/>
-          <p:nvPr/>
-        </p:nvSpPr>
-        <p:spPr>
-          <a:xfrm>
-            <a:off x="620000" y="1850000"/>
-            <a:ext cx="2440000" cy="1900000"/>
-          </a:xfrm>
-          <a:prstGeom prst="rect">
-            <a:avLst/>
-          </a:prstGeom>
-          <a:noFill/>
-          <a:ln/>
-        </p:spPr>
-        <p:txBody>
-          <a:bodyPr wrap="square" rtlCol="0" anchor="ctr"/>
-          <a:lstStyle/>
-          <a:p>
-            <a:pPr marL="0" indent="0" algn="ctr">
-              <a:buNone/>
-            </a:pPr>
-            <a:r>
-              <a:rPr lang="en-US" sz="3000" dirty="0">
-                <a:solidFill>
-                  <a:srgbClr val="4FC3F7"/>
-                </a:solidFill>
-              </a:rPr>
-              <a:t>📦</a:t>
-            </a:r>
-          </a:p>
-          <a:p>
-            <a:pPr marL="0" indent="0" algn="ctr">
-              <a:buNone/>
-            </a:pPr>
-            <a:r>
-              <a:rPr lang="ko-KR" altLang="en-US" sz="1500" b="1" dirty="0">
-                <a:solidFill>
-                  <a:srgbClr val="4FC3F7"/>
-                </a:solidFill>
-              </a:rPr>
-              <a:t>Part 2</a:t>
-            </a:r>
-          </a:p>
-          <a:p>
-            <a:pPr marL="0" indent="0" algn="ctr">
-              <a:buNone/>
-            </a:pPr>
-            <a:r>
-              <a:rPr lang="ko-KR" altLang="en-US" sz="1300" b="1" dirty="0">
-                <a:solidFill>
-                  <a:srgbClr val="1E2761"/>
-                </a:solidFill>
-              </a:rPr>
-              <a:t>부품 도감</a:t>
-            </a:r>
-          </a:p>
-          <a:p>
-            <a:pPr marL="0" indent="0" algn="ctr">
-              <a:buNone/>
-            </a:pPr>
-            <a:r>
-              <a:rPr lang="ko-KR" altLang="en-US" sz="1000" dirty="0">
-                <a:solidFill>
-                  <a:srgbClr val="6B7280"/>
-                </a:solidFill>
-              </a:rPr>
-              <a:t>SKILL.md · CLAUDE.md</a:t>
-            </a:r>
-          </a:p>
-          <a:p>
-            <a:pPr marL="0" indent="0" algn="ctr">
-              <a:buNone/>
-            </a:pPr>
-            <a:r>
-              <a:rPr lang="ko-KR" altLang="en-US" sz="1000" dirty="0">
-                <a:solidFill>
-                  <a:srgbClr val="6B7280"/>
-                </a:solidFill>
-              </a:rPr>
-              <a:t>AGENTS.md · MEMORY.md</a:t>
-            </a:r>
-          </a:p>
-        </p:txBody>
-      </p:sp>
-      <p:sp>
-        <p:nvSpPr>
-          <p:cNvPr id="20" name="Card2"/>
-          <p:cNvSpPr/>
-          <p:nvPr/>
-        </p:nvSpPr>
-        <p:spPr>
-          <a:xfrm>
-            <a:off x="3232000" y="1750000"/>
-            <a:ext cx="2680000" cy="2100000"/>
-          </a:xfrm>
-          <a:prstGeom prst="roundRect">
-            <a:avLst>
-              <a:gd name="adj" fmla="val 8000"/>
-            </a:avLst>
-          </a:prstGeom>
-          <a:solidFill>
-            <a:srgbClr val="FFFFFF"/>
-          </a:solidFill>
-          <a:ln w="19050">
-            <a:solidFill>
-              <a:srgbClr val="34D399"/>
-            </a:solidFill>
-          </a:ln>
-          <a:effectLst>
-            <a:outerShdw blurRad="76200" dist="12700" dir="8100000" algn="bl" rotWithShape="0">
-              <a:srgbClr val="000000">
-                <a:alpha val="12000"/>
-              </a:srgbClr>
-            </a:outerShdw>
-          </a:effectLst>
-        </p:spPr>
-      </p:sp>
-      <p:sp>
-        <p:nvSpPr>
-          <p:cNvPr id="21" name="Card2T"/>
-          <p:cNvSpPr/>
-          <p:nvPr/>
-        </p:nvSpPr>
-        <p:spPr>
-          <a:xfrm>
-            <a:off x="3352000" y="1850000"/>
-            <a:ext cx="2440000" cy="1900000"/>
-          </a:xfrm>
-          <a:prstGeom prst="rect">
-            <a:avLst/>
-          </a:prstGeom>
-          <a:noFill/>
-          <a:ln/>
-        </p:spPr>
-        <p:txBody>
-          <a:bodyPr wrap="square" rtlCol="0" anchor="ctr"/>
-          <a:lstStyle/>
-          <a:p>
-            <a:pPr marL="0" indent="0" algn="ctr">
-              <a:buNone/>
-            </a:pPr>
-            <a:r>
-              <a:rPr lang="en-US" sz="3000" dirty="0">
-                <a:solidFill>
-                  <a:srgbClr val="34D399"/>
-                </a:solidFill>
-              </a:rPr>
-              <a:t>🎯</a:t>
-            </a:r>
-          </a:p>
-          <a:p>
-            <a:pPr marL="0" indent="0" algn="ctr">
-              <a:buNone/>
-            </a:pPr>
-            <a:r>
-              <a:rPr lang="ko-KR" altLang="en-US" sz="1500" b="1" dirty="0">
-                <a:solidFill>
-                  <a:srgbClr val="34D399"/>
-                </a:solidFill>
-              </a:rPr>
-              <a:t>클라이맥스</a:t>
-            </a:r>
-          </a:p>
-          <a:p>
-            <a:pPr marL="0" indent="0" algn="ctr">
-              <a:buNone/>
-            </a:pPr>
-            <a:r>
-              <a:rPr lang="ko-KR" altLang="en-US" sz="1300" b="1" dirty="0">
-                <a:solidFill>
-                  <a:srgbClr val="1E2761"/>
-                </a:solidFill>
-              </a:rPr>
-              <a:t>표준으로 수렴</a:t>
-            </a:r>
-          </a:p>
-          <a:p>
-            <a:pPr marL="0" indent="0" algn="ctr">
-              <a:buNone/>
-            </a:pPr>
-            <a:r>
-              <a:rPr lang="ko-KR" altLang="en-US" sz="1000" dirty="0">
-                <a:solidFill>
-                  <a:srgbClr val="6B7280"/>
-                </a:solidFill>
-              </a:rPr>
-              <a:t>3사가 같은 규격으로</a:t>
-            </a:r>
-          </a:p>
-          <a:p>
-            <a:pPr marL="0" indent="0" algn="ctr">
-              <a:buNone/>
-            </a:pPr>
-            <a:r>
-              <a:rPr lang="ko-KR" altLang="en-US" sz="1000" dirty="0">
-                <a:solidFill>
-                  <a:srgbClr val="6B7280"/>
-                </a:solidFill>
-              </a:rPr>
-              <a:t>수렴하는 흐름</a:t>
-            </a:r>
-          </a:p>
-        </p:txBody>
-      </p:sp>
-      <p:sp>
-        <p:nvSpPr>
-          <p:cNvPr id="30" name="Card3"/>
-          <p:cNvSpPr/>
-          <p:nvPr/>
-        </p:nvSpPr>
-        <p:spPr>
-          <a:xfrm>
-            <a:off x="5964000" y="1750000"/>
-            <a:ext cx="2680000" cy="2100000"/>
-          </a:xfrm>
-          <a:prstGeom prst="roundRect">
-            <a:avLst>
-              <a:gd name="adj" fmla="val 8000"/>
-            </a:avLst>
-          </a:prstGeom>
-          <a:solidFill>
-            <a:srgbClr val="FFFFFF"/>
-          </a:solidFill>
-          <a:ln w="19050">
-            <a:solidFill>
-              <a:srgbClr val="A78BFA"/>
-            </a:solidFill>
-          </a:ln>
-          <a:effectLst>
-            <a:outerShdw blurRad="76200" dist="12700" dir="8100000" algn="bl" rotWithShape="0">
-              <a:srgbClr val="000000">
-                <a:alpha val="12000"/>
-              </a:srgbClr>
-            </a:outerShdw>
-          </a:effectLst>
-        </p:spPr>
-      </p:sp>
-      <p:sp>
-        <p:nvSpPr>
-          <p:cNvPr id="31" name="Card3T"/>
-          <p:cNvSpPr/>
-          <p:nvPr/>
-        </p:nvSpPr>
-        <p:spPr>
-          <a:xfrm>
-            <a:off x="6084000" y="1850000"/>
-            <a:ext cx="2440000" cy="1900000"/>
-          </a:xfrm>
-          <a:prstGeom prst="rect">
-            <a:avLst/>
-          </a:prstGeom>
-          <a:noFill/>
-          <a:ln/>
-        </p:spPr>
-        <p:txBody>
-          <a:bodyPr wrap="square" rtlCol="0" anchor="ctr"/>
-          <a:lstStyle/>
-          <a:p>
-            <a:pPr marL="0" indent="0" algn="ctr">
-              <a:buNone/>
-            </a:pPr>
-            <a:r>
-              <a:rPr lang="en-US" sz="3000" dirty="0">
-                <a:solidFill>
-                  <a:srgbClr val="A78BFA"/>
-                </a:solidFill>
-              </a:rPr>
-              <a:t>🚀</a:t>
-            </a:r>
-          </a:p>
-          <a:p>
-            <a:pPr marL="0" indent="0" algn="ctr">
-              <a:buNone/>
-            </a:pPr>
-            <a:r>
-              <a:rPr lang="ko-KR" altLang="en-US" sz="1500" b="1" dirty="0">
-                <a:solidFill>
-                  <a:srgbClr val="A78BFA"/>
-                </a:solidFill>
-              </a:rPr>
-              <a:t>Part 3</a:t>
-            </a:r>
-          </a:p>
-          <a:p>
-            <a:pPr marL="0" indent="0" algn="ctr">
-              <a:buNone/>
-            </a:pPr>
-            <a:r>
-              <a:rPr lang="ko-KR" altLang="en-US" sz="1300" b="1" dirty="0">
-                <a:solidFill>
-                  <a:srgbClr val="1E2761"/>
-                </a:solidFill>
-              </a:rPr>
-              <a:t>실적용</a:t>
-            </a:r>
-          </a:p>
-          <a:p>
-            <a:pPr marL="0" indent="0" algn="ctr">
-              <a:buNone/>
-            </a:pPr>
-            <a:r>
-              <a:rPr lang="ko-KR" altLang="en-US" sz="1000" dirty="0">
-                <a:solidFill>
-                  <a:srgbClr val="6B7280"/>
-                </a:solidFill>
-              </a:rPr>
-              <a:t>superpowers·라이브</a:t>
-            </a:r>
-          </a:p>
-          <a:p>
-            <a:pPr marL="0" indent="0" algn="ctr">
-              <a:buNone/>
-            </a:pPr>
-            <a:r>
-              <a:rPr lang="ko-KR" altLang="en-US" sz="1000" dirty="0">
-                <a:solidFill>
-                  <a:srgbClr val="6B7280"/>
-                </a:solidFill>
-              </a:rPr>
-              <a:t>바이브코딩 데모</a:t>
-            </a:r>
-          </a:p>
-        </p:txBody>
-      </p:sp>
-      <p:sp>
-        <p:nvSpPr>
-          <p:cNvPr id="90" name="Closing"/>
-          <p:cNvSpPr/>
-          <p:nvPr/>
-        </p:nvSpPr>
-        <p:spPr>
-          <a:xfrm>
-            <a:off x="500000" y="4100000"/>
-            <a:ext cx="8144000" cy="820000"/>
-          </a:xfrm>
-          <a:prstGeom prst="roundRect">
-            <a:avLst>
-              <a:gd name="adj" fmla="val 15000"/>
-            </a:avLst>
-          </a:prstGeom>
-          <a:solidFill>
-            <a:srgbClr val="1E2761"/>
-          </a:solidFill>
-          <a:ln w="19050">
-            <a:solidFill>
-              <a:srgbClr val="A78BFA"/>
-            </a:solidFill>
-          </a:ln>
-        </p:spPr>
-      </p:sp>
-      <p:sp>
-        <p:nvSpPr>
-          <p:cNvPr id="91" name="ClosingText"/>
-          <p:cNvSpPr/>
-          <p:nvPr/>
-        </p:nvSpPr>
-        <p:spPr>
-          <a:xfrm>
-            <a:off x="500000" y="4100000"/>
-            <a:ext cx="8144000" cy="820000"/>
-          </a:xfrm>
-          <a:prstGeom prst="rect">
-            <a:avLst/>
-          </a:prstGeom>
-          <a:noFill/>
-          <a:ln/>
-        </p:spPr>
-        <p:txBody>
-          <a:bodyPr wrap="square" rtlCol="0" anchor="ctr"/>
-          <a:lstStyle/>
-          <a:p>
-            <a:pPr marL="0" indent="0" algn="ctr">
-              <a:buNone/>
-            </a:pPr>
-            <a:r>
-              <a:rPr lang="ko-KR" altLang="en-US" sz="1600" b="1" dirty="0">
-                <a:solidFill>
-                  <a:srgbClr val="C8DCFC"/>
-                </a:solidFill>
-              </a:rPr>
-              <a:t xml:space="preserve">개념은 정리했으니, 이제 </a:t>
-            </a:r>
-            <a:r>
-              <a:rPr lang="ko-KR" altLang="en-US" sz="1600" b="1" dirty="0">
-                <a:solidFill>
-                  <a:srgbClr val="A78BFA"/>
-                </a:solidFill>
-              </a:rPr>
-              <a:t>실체와 실적용</a:t>
-            </a:r>
-            <a:r>
-              <a:rPr lang="ko-KR" altLang="en-US" sz="1600" b="1" dirty="0">
-                <a:solidFill>
-                  <a:srgbClr val="C8DCFC"/>
-                </a:solidFill>
-              </a:rPr>
-              <a:t xml:space="preserve"> 으로 </a:t>
-            </a:r>
-            <a:endParaRPr lang="en-US" sz="1600" dirty="0"/>
           </a:p>
         </p:txBody>
       </p:sp>
